--- a/relatorios/relatorio_mensal.pptx
+++ b/relatorios/relatorio_mensal.pptx
@@ -5,7 +5,8 @@
     <p:sldMasterId id="2147483648" r:id="rIdSm"/>
   </p:sldMasterIdLst>
   <p:sldIdLst>
-</p:sldIdLst>
+    <p:sldId id="2561" r:id="rId1"/>
+  </p:sldIdLst>
   <p:sldSz cx="10693400" cy="7556500" type="custom"/>
   <p:notesSz cx="6858000" cy="9144000"/>
 </p:presentation>
@@ -65,6 +66,2475 @@
     <p:sldLayoutId id="2147483649" r:id="rIdSl"/>
   </p:sldLayoutIdLst>
 </p:sldMaster>
+</file>
+
+<file path=ppt/slides/slide1.xml><?xml version="1.0" encoding="utf-8"?>
+<p:sld xmlns:a="http://schemas.openxmlformats.org/drawingml/2006/main" xmlns:r="http://schemas.openxmlformats.org/officeDocument/2006/relationships" xmlns:p="http://schemas.openxmlformats.org/presentationml/2006/main">
+  <p:cSld>
+    <p:spTree>
+      <p:nvGrpSpPr>
+        <p:cNvPr id="1" name=""/>
+        <p:cNvGrpSpPr/>
+        <p:nvPr/>
+      </p:nvGrpSpPr>
+      <p:grpSpPr>
+        <a:xfrm>
+          <a:off x="0" y="0"/>
+          <a:ext cx="0" cy="0"/>
+          <a:chOff x="0" y="0"/>
+          <a:chExt cx="0" cy="0"/>
+        </a:xfrm>
+      </p:grpSpPr>
+      <p:sp>
+        <p:nvSpPr>
+          <p:cNvPr id="1626972812" name="Text">
+    </p:cNvPr>
+          <p:cNvSpPr>
+            <a:spLocks noGrp="1"/>
+          </p:cNvSpPr>
+          <p:nvPr/>
+        </p:nvSpPr>
+        <p:spPr>
+          <a:xfrm rot="0">
+            <a:off x="254000" y="698500"/>
+            <a:ext cx="4864100" cy="241300"/>
+          </a:xfrm>
+          <a:prstGeom prst="rect">
+            <a:avLst/>
+          </a:prstGeom>
+        </p:spPr>
+        <p:txBody>
+          <a:bodyPr wrap="square" lIns="0" tIns="0" rIns="0" bIns="0" rtlCol="0" anchor="ctr"/>
+          <a:lstStyle/>
+          <a:p>
+            <a:pPr algn="l">
+              <a:lnSpc>
+                <a:spcPct val="100%"/>
+              </a:lnSpc>
+              <a:defRPr sz="1600" b="1">
+                <a:solidFill>
+                  <a:srgbClr val="000000"/>
+                </a:solidFill>
+                <a:latin typeface="Times New Roman"/>
+                <a:ea typeface="Times New Roman"/>
+                <a:cs typeface="Times New Roman"/>
+              </a:defRPr>
+            </a:pPr>
+            <a:r>
+              <a:rPr sz="1600" b="1">
+                <a:latin typeface="Times New Roman"/>
+                <a:ea typeface="Times New Roman"/>
+                <a:cs typeface="Times New Roman"/>
+              </a:rPr>
+              <a:t>Relatório de Factura/Recibo - Mensal</a:t>
+            </a:r>
+          </a:p>
+        </p:txBody>
+      </p:sp>
+      <p:sp>
+        <p:nvSpPr>
+          <p:cNvPr id="2116702937" name="Text">
+    </p:cNvPr>
+          <p:cNvSpPr>
+            <a:spLocks noGrp="1"/>
+          </p:cNvSpPr>
+          <p:nvPr/>
+        </p:nvSpPr>
+        <p:spPr>
+          <a:xfrm rot="0">
+            <a:off x="8204200" y="254000"/>
+            <a:ext cx="2171700" cy="165100"/>
+          </a:xfrm>
+          <a:prstGeom prst="rect">
+            <a:avLst/>
+          </a:prstGeom>
+        </p:spPr>
+        <p:txBody>
+          <a:bodyPr wrap="square" lIns="0" tIns="0" rIns="0" bIns="0" rtlCol="0" anchor="t"/>
+          <a:lstStyle/>
+          <a:p>
+            <a:pPr algn="r">
+              <a:lnSpc>
+                <a:spcPct val="100%"/>
+              </a:lnSpc>
+              <a:defRPr sz="1000">
+                <a:solidFill>
+                  <a:srgbClr val="000000"/>
+                </a:solidFill>
+                <a:latin typeface="SansSerif"/>
+                <a:ea typeface="SansSerif"/>
+                <a:cs typeface="SansSerif"/>
+              </a:defRPr>
+            </a:pPr>
+            <a:r>
+              <a:rPr sz="1000">
+</a:rPr>
+              <a:t>Ano: </a:t>
+            </a:r>
+            <a:r>
+              <a:rPr sz="1000" b="1">
+</a:rPr>
+              <a:t>2025</a:t>
+            </a:r>
+          </a:p>
+        </p:txBody>
+      </p:sp>
+      <p:sp>
+        <p:nvSpPr>
+          <p:cNvPr id="626840566" name="Text">
+    </p:cNvPr>
+          <p:cNvSpPr>
+            <a:spLocks noGrp="1"/>
+          </p:cNvSpPr>
+          <p:nvPr/>
+        </p:nvSpPr>
+        <p:spPr>
+          <a:xfrm rot="0">
+            <a:off x="8204200" y="406400"/>
+            <a:ext cx="2171700" cy="165100"/>
+          </a:xfrm>
+          <a:prstGeom prst="rect">
+            <a:avLst/>
+          </a:prstGeom>
+        </p:spPr>
+        <p:txBody>
+          <a:bodyPr wrap="square" lIns="0" tIns="0" rIns="0" bIns="0" rtlCol="0" anchor="t"/>
+          <a:lstStyle/>
+          <a:p>
+            <a:pPr algn="r">
+              <a:lnSpc>
+                <a:spcPct val="100%"/>
+              </a:lnSpc>
+              <a:defRPr sz="1000">
+                <a:solidFill>
+                  <a:srgbClr val="000000"/>
+                </a:solidFill>
+                <a:latin typeface="SansSerif"/>
+                <a:ea typeface="SansSerif"/>
+                <a:cs typeface="SansSerif"/>
+              </a:defRPr>
+            </a:pPr>
+            <a:r>
+              <a:rPr sz="1000">
+</a:rPr>
+              <a:t>Mês: </a:t>
+            </a:r>
+            <a:r>
+              <a:rPr sz="1000" b="1">
+</a:rPr>
+              <a:t>Dezembro</a:t>
+            </a:r>
+          </a:p>
+        </p:txBody>
+      </p:sp>
+      <p:sp>
+        <p:nvSpPr>
+          <p:cNvPr id="935113953" name="Line"/>
+          <p:cNvSpPr>
+            <a:spLocks noGrp="1"/>
+          </p:cNvSpPr>
+          <p:nvPr/>
+        </p:nvSpPr>
+        <p:spPr>
+          <a:xfrm flipV="1">
+            <a:off x="254000" y="952500"/>
+            <a:ext cx="10185400" cy="0"/>
+          </a:xfrm>
+          <a:prstGeom prst="line">
+            <a:avLst/>
+          </a:prstGeom>
+          <a:solidFill>
+            <a:srgbClr val="FFFFFF"/>
+          </a:solidFill>
+          <a:ln w="12700">
+            <a:solidFill>
+              <a:srgbClr val="000000"/>
+            </a:solidFill>
+            <a:prstDash val="solid"/>
+          </a:ln>
+        </p:spPr>
+        <p:txBody>
+          <a:bodyPr rtlCol="0" anchor="ctr"/>
+          <a:lstStyle/>
+          <a:p>
+            <a:pPr algn="ctr"/>
+          </a:p>
+        </p:txBody>
+      </p:sp>
+      <p:sp>
+        <p:nvSpPr>
+          <p:cNvPr id="161740857" name="Text">
+    </p:cNvPr>
+          <p:cNvSpPr>
+            <a:spLocks noGrp="1"/>
+          </p:cNvSpPr>
+          <p:nvPr/>
+        </p:nvSpPr>
+        <p:spPr>
+          <a:xfrm rot="0">
+            <a:off x="8204200" y="774700"/>
+            <a:ext cx="2171700" cy="165100"/>
+          </a:xfrm>
+          <a:prstGeom prst="rect">
+            <a:avLst/>
+          </a:prstGeom>
+        </p:spPr>
+        <p:txBody>
+          <a:bodyPr wrap="square" lIns="0" tIns="0" rIns="0" bIns="0" rtlCol="0" anchor="b"/>
+          <a:lstStyle/>
+          <a:p>
+            <a:pPr algn="r">
+              <a:lnSpc>
+                <a:spcPct val="100%"/>
+              </a:lnSpc>
+              <a:defRPr sz="900">
+                <a:solidFill>
+                  <a:srgbClr val="000000"/>
+                </a:solidFill>
+                <a:latin typeface="SansSerif"/>
+                <a:ea typeface="SansSerif"/>
+                <a:cs typeface="SansSerif"/>
+              </a:defRPr>
+            </a:pPr>
+            <a:r>
+              <a:rPr sz="900">
+</a:rPr>
+              <a:t>(Valores em </a:t>
+            </a:r>
+            <a:r>
+              <a:rPr sz="900" b="1">
+</a:rPr>
+              <a:t>AKZ</a:t>
+            </a:r>
+            <a:r>
+              <a:rPr sz="900">
+</a:rPr>
+              <a:t>)</a:t>
+            </a:r>
+          </a:p>
+        </p:txBody>
+      </p:sp>
+      <p:sp>
+        <p:nvSpPr>
+          <p:cNvPr id="632545102" name="Text">
+    </p:cNvPr>
+          <p:cNvSpPr>
+            <a:spLocks noGrp="1"/>
+          </p:cNvSpPr>
+          <p:nvPr/>
+        </p:nvSpPr>
+        <p:spPr>
+          <a:xfrm rot="0">
+            <a:off x="1295400" y="965200"/>
+            <a:ext cx="863600" cy="190500"/>
+          </a:xfrm>
+          <a:prstGeom prst="rect">
+            <a:avLst/>
+          </a:prstGeom>
+          <a:solidFill>
+            <a:srgbClr val="CCCCCC"/>
+          </a:solidFill>
+        </p:spPr>
+        <p:txBody>
+          <a:bodyPr wrap="square" lIns="0" tIns="0" rIns="0" bIns="0" rtlCol="0" anchor="ctr"/>
+          <a:lstStyle/>
+          <a:p>
+            <a:pPr algn="ctr">
+              <a:lnSpc>
+                <a:spcPct val="100%"/>
+              </a:lnSpc>
+              <a:defRPr sz="800" b="1">
+                <a:solidFill>
+                  <a:srgbClr val="000000"/>
+                </a:solidFill>
+                <a:latin typeface="Times New Roman"/>
+                <a:ea typeface="Times New Roman"/>
+                <a:cs typeface="Times New Roman"/>
+              </a:defRPr>
+            </a:pPr>
+            <a:r>
+              <a:rPr sz="800" b="1">
+                <a:latin typeface="Times New Roman"/>
+                <a:ea typeface="Times New Roman"/>
+                <a:cs typeface="Times New Roman"/>
+              </a:rPr>
+              <a:t>Carne Bovina</a:t>
+            </a:r>
+          </a:p>
+        </p:txBody>
+      </p:sp>
+      <p:sp>
+        <p:nvSpPr>
+          <p:cNvPr id="1723034477" name="Text">
+    </p:cNvPr>
+          <p:cNvSpPr>
+            <a:spLocks noGrp="1"/>
+          </p:cNvSpPr>
+          <p:nvPr/>
+        </p:nvSpPr>
+        <p:spPr>
+          <a:xfrm rot="0">
+            <a:off x="254000" y="965200"/>
+            <a:ext cx="685800" cy="190500"/>
+          </a:xfrm>
+          <a:prstGeom prst="rect">
+            <a:avLst/>
+          </a:prstGeom>
+          <a:solidFill>
+            <a:srgbClr val="FFFFFF"/>
+          </a:solidFill>
+          <a:ln w="6350">
+            <a:solidFill>
+              <a:srgbClr val="999999"/>
+            </a:solidFill>
+            <a:prstDash val="solid"/>
+          </a:ln>
+        </p:spPr>
+        <p:txBody>
+          <a:bodyPr wrap="square" lIns="0" tIns="0" rIns="0" bIns="0" rtlCol="0" anchor="ctr"/>
+          <a:lstStyle/>
+          <a:p>
+            <a:pPr algn="ctr">
+              <a:lnSpc>
+                <a:spcPct val="100%"/>
+              </a:lnSpc>
+              <a:defRPr sz="800" b="1">
+                <a:solidFill>
+                  <a:srgbClr val="000000"/>
+                </a:solidFill>
+                <a:latin typeface="Times New Roman"/>
+                <a:ea typeface="Times New Roman"/>
+                <a:cs typeface="Times New Roman"/>
+              </a:defRPr>
+            </a:pPr>
+            <a:r>
+              <a:rPr sz="800" b="1">
+                <a:latin typeface="Times New Roman"/>
+                <a:ea typeface="Times New Roman"/>
+                <a:cs typeface="Times New Roman"/>
+              </a:rPr>
+              <a:t>Data</a:t>
+            </a:r>
+          </a:p>
+        </p:txBody>
+      </p:sp>
+      <p:sp>
+        <p:nvSpPr>
+          <p:cNvPr id="888848614" name="Text">
+    </p:cNvPr>
+          <p:cNvSpPr>
+            <a:spLocks noGrp="1"/>
+          </p:cNvSpPr>
+          <p:nvPr/>
+        </p:nvSpPr>
+        <p:spPr>
+          <a:xfrm rot="0">
+            <a:off x="939800" y="965200"/>
+            <a:ext cx="355600" cy="190500"/>
+          </a:xfrm>
+          <a:prstGeom prst="rect">
+            <a:avLst/>
+          </a:prstGeom>
+          <a:solidFill>
+            <a:srgbClr val="CCCCCC"/>
+          </a:solidFill>
+        </p:spPr>
+        <p:txBody>
+          <a:bodyPr wrap="square" lIns="0" tIns="0" rIns="0" bIns="0" rtlCol="0" anchor="ctr"/>
+          <a:lstStyle/>
+          <a:p>
+            <a:pPr algn="ctr">
+              <a:lnSpc>
+                <a:spcPct val="100%"/>
+              </a:lnSpc>
+              <a:defRPr sz="800" b="1">
+                <a:solidFill>
+                  <a:srgbClr val="000000"/>
+                </a:solidFill>
+                <a:latin typeface="Times New Roman"/>
+                <a:ea typeface="Times New Roman"/>
+                <a:cs typeface="Times New Roman"/>
+              </a:defRPr>
+            </a:pPr>
+            <a:r>
+              <a:rPr sz="800" b="1">
+                <a:latin typeface="Times New Roman"/>
+                <a:ea typeface="Times New Roman"/>
+                <a:cs typeface="Times New Roman"/>
+              </a:rPr>
+              <a:t>Diário</a:t>
+            </a:r>
+          </a:p>
+        </p:txBody>
+      </p:sp>
+      <p:sp>
+        <p:nvSpPr>
+          <p:cNvPr id="579769456" name="Text">
+    </p:cNvPr>
+          <p:cNvSpPr>
+            <a:spLocks noGrp="1"/>
+          </p:cNvSpPr>
+          <p:nvPr/>
+        </p:nvSpPr>
+        <p:spPr>
+          <a:xfrm rot="0">
+            <a:off x="3886200" y="965200"/>
+            <a:ext cx="863600" cy="190500"/>
+          </a:xfrm>
+          <a:prstGeom prst="rect">
+            <a:avLst/>
+          </a:prstGeom>
+          <a:solidFill>
+            <a:srgbClr val="CCCCCC"/>
+          </a:solidFill>
+        </p:spPr>
+        <p:txBody>
+          <a:bodyPr wrap="square" lIns="0" tIns="0" rIns="0" bIns="0" rtlCol="0" anchor="ctr"/>
+          <a:lstStyle/>
+          <a:p>
+            <a:pPr algn="ctr">
+              <a:lnSpc>
+                <a:spcPct val="100%"/>
+              </a:lnSpc>
+              <a:defRPr sz="800" b="1">
+                <a:solidFill>
+                  <a:srgbClr val="000000"/>
+                </a:solidFill>
+                <a:latin typeface="Times New Roman"/>
+                <a:ea typeface="Times New Roman"/>
+                <a:cs typeface="Times New Roman"/>
+              </a:defRPr>
+            </a:pPr>
+            <a:r>
+              <a:rPr sz="800" b="1">
+                <a:latin typeface="Times New Roman"/>
+                <a:ea typeface="Times New Roman"/>
+                <a:cs typeface="Times New Roman"/>
+              </a:rPr>
+              <a:t>Carne Ovina</a:t>
+            </a:r>
+          </a:p>
+        </p:txBody>
+      </p:sp>
+      <p:sp>
+        <p:nvSpPr>
+          <p:cNvPr id="435975872" name="Text">
+    </p:cNvPr>
+          <p:cNvSpPr>
+            <a:spLocks noGrp="1"/>
+          </p:cNvSpPr>
+          <p:nvPr/>
+        </p:nvSpPr>
+        <p:spPr>
+          <a:xfrm rot="0">
+            <a:off x="2159000" y="965200"/>
+            <a:ext cx="863600" cy="190500"/>
+          </a:xfrm>
+          <a:prstGeom prst="rect">
+            <a:avLst/>
+          </a:prstGeom>
+          <a:solidFill>
+            <a:srgbClr val="CCCCCC"/>
+          </a:solidFill>
+        </p:spPr>
+        <p:txBody>
+          <a:bodyPr wrap="square" lIns="0" tIns="0" rIns="0" bIns="0" rtlCol="0" anchor="ctr"/>
+          <a:lstStyle/>
+          <a:p>
+            <a:pPr algn="ctr">
+              <a:lnSpc>
+                <a:spcPct val="100%"/>
+              </a:lnSpc>
+              <a:defRPr sz="800" b="1">
+                <a:solidFill>
+                  <a:srgbClr val="000000"/>
+                </a:solidFill>
+                <a:latin typeface="Times New Roman"/>
+                <a:ea typeface="Times New Roman"/>
+                <a:cs typeface="Times New Roman"/>
+              </a:defRPr>
+            </a:pPr>
+            <a:r>
+              <a:rPr sz="800" b="1">
+                <a:latin typeface="Times New Roman"/>
+                <a:ea typeface="Times New Roman"/>
+                <a:cs typeface="Times New Roman"/>
+              </a:rPr>
+              <a:t>Carne Suina</a:t>
+            </a:r>
+          </a:p>
+        </p:txBody>
+      </p:sp>
+      <p:sp>
+        <p:nvSpPr>
+          <p:cNvPr id="1693032081" name="Text">
+    </p:cNvPr>
+          <p:cNvSpPr>
+            <a:spLocks noGrp="1"/>
+          </p:cNvSpPr>
+          <p:nvPr/>
+        </p:nvSpPr>
+        <p:spPr>
+          <a:xfrm rot="0">
+            <a:off x="9067800" y="965200"/>
+            <a:ext cx="1371600" cy="190500"/>
+          </a:xfrm>
+          <a:prstGeom prst="rect">
+            <a:avLst/>
+          </a:prstGeom>
+          <a:solidFill>
+            <a:srgbClr val="FFFFFF"/>
+          </a:solidFill>
+          <a:ln w="6350">
+            <a:solidFill>
+              <a:srgbClr val="99CCFF"/>
+            </a:solidFill>
+            <a:prstDash val="solid"/>
+          </a:ln>
+        </p:spPr>
+        <p:txBody>
+          <a:bodyPr wrap="square" lIns="0" tIns="0" rIns="0" bIns="0" rtlCol="0" anchor="ctr"/>
+          <a:lstStyle/>
+          <a:p>
+            <a:pPr algn="ctr">
+              <a:lnSpc>
+                <a:spcPct val="100%"/>
+              </a:lnSpc>
+              <a:defRPr sz="1000" b="1">
+                <a:solidFill>
+                  <a:srgbClr val="000000"/>
+                </a:solidFill>
+                <a:latin typeface="Times New Roman"/>
+                <a:ea typeface="Times New Roman"/>
+                <a:cs typeface="Times New Roman"/>
+              </a:defRPr>
+            </a:pPr>
+            <a:r>
+              <a:rPr sz="1000" b="1">
+                <a:latin typeface="Times New Roman"/>
+                <a:ea typeface="Times New Roman"/>
+                <a:cs typeface="Times New Roman"/>
+              </a:rPr>
+              <a:t>Total</a:t>
+            </a:r>
+          </a:p>
+        </p:txBody>
+      </p:sp>
+      <p:sp>
+        <p:nvSpPr>
+          <p:cNvPr id="116821786" name="Text">
+    </p:cNvPr>
+          <p:cNvSpPr>
+            <a:spLocks noGrp="1"/>
+          </p:cNvSpPr>
+          <p:nvPr/>
+        </p:nvSpPr>
+        <p:spPr>
+          <a:xfrm rot="0">
+            <a:off x="4749800" y="965200"/>
+            <a:ext cx="863600" cy="190500"/>
+          </a:xfrm>
+          <a:prstGeom prst="rect">
+            <a:avLst/>
+          </a:prstGeom>
+          <a:solidFill>
+            <a:srgbClr val="CCCCCC"/>
+          </a:solidFill>
+        </p:spPr>
+        <p:txBody>
+          <a:bodyPr wrap="square" lIns="0" tIns="0" rIns="0" bIns="0" rtlCol="0" anchor="ctr"/>
+          <a:lstStyle/>
+          <a:p>
+            <a:pPr algn="ctr">
+              <a:lnSpc>
+                <a:spcPct val="100%"/>
+              </a:lnSpc>
+              <a:defRPr sz="800" b="1">
+                <a:solidFill>
+                  <a:srgbClr val="000000"/>
+                </a:solidFill>
+                <a:latin typeface="Times New Roman"/>
+                <a:ea typeface="Times New Roman"/>
+                <a:cs typeface="Times New Roman"/>
+              </a:defRPr>
+            </a:pPr>
+            <a:r>
+              <a:rPr sz="800" b="1">
+                <a:latin typeface="Times New Roman"/>
+                <a:ea typeface="Times New Roman"/>
+                <a:cs typeface="Times New Roman"/>
+              </a:rPr>
+              <a:t>Aves</a:t>
+            </a:r>
+          </a:p>
+        </p:txBody>
+      </p:sp>
+      <p:sp>
+        <p:nvSpPr>
+          <p:cNvPr id="1351464608" name="Text">
+    </p:cNvPr>
+          <p:cNvSpPr>
+            <a:spLocks noGrp="1"/>
+          </p:cNvSpPr>
+          <p:nvPr/>
+        </p:nvSpPr>
+        <p:spPr>
+          <a:xfrm rot="0">
+            <a:off x="7340600" y="965200"/>
+            <a:ext cx="863600" cy="190500"/>
+          </a:xfrm>
+          <a:prstGeom prst="rect">
+            <a:avLst/>
+          </a:prstGeom>
+          <a:solidFill>
+            <a:srgbClr val="CCCCCC"/>
+          </a:solidFill>
+        </p:spPr>
+        <p:txBody>
+          <a:bodyPr wrap="square" lIns="0" tIns="0" rIns="0" bIns="0" rtlCol="0" anchor="ctr"/>
+          <a:lstStyle/>
+          <a:p>
+            <a:pPr algn="ctr">
+              <a:lnSpc>
+                <a:spcPct val="100%"/>
+              </a:lnSpc>
+              <a:defRPr sz="800" b="1">
+                <a:solidFill>
+                  <a:srgbClr val="000000"/>
+                </a:solidFill>
+                <a:latin typeface="Times New Roman"/>
+                <a:ea typeface="Times New Roman"/>
+                <a:cs typeface="Times New Roman"/>
+              </a:defRPr>
+            </a:pPr>
+            <a:r>
+              <a:rPr sz="800" b="1">
+                <a:latin typeface="Times New Roman"/>
+                <a:ea typeface="Times New Roman"/>
+                <a:cs typeface="Times New Roman"/>
+              </a:rPr>
+              <a:t>Sal</a:t>
+            </a:r>
+          </a:p>
+        </p:txBody>
+      </p:sp>
+      <p:sp>
+        <p:nvSpPr>
+          <p:cNvPr id="708673543" name="Text">
+    </p:cNvPr>
+          <p:cNvSpPr>
+            <a:spLocks noGrp="1"/>
+          </p:cNvSpPr>
+          <p:nvPr/>
+        </p:nvSpPr>
+        <p:spPr>
+          <a:xfrm rot="0">
+            <a:off x="5613400" y="965200"/>
+            <a:ext cx="863600" cy="190500"/>
+          </a:xfrm>
+          <a:prstGeom prst="rect">
+            <a:avLst/>
+          </a:prstGeom>
+          <a:solidFill>
+            <a:srgbClr val="CCCCCC"/>
+          </a:solidFill>
+        </p:spPr>
+        <p:txBody>
+          <a:bodyPr wrap="square" lIns="0" tIns="0" rIns="0" bIns="0" rtlCol="0" anchor="ctr"/>
+          <a:lstStyle/>
+          <a:p>
+            <a:pPr algn="ctr">
+              <a:lnSpc>
+                <a:spcPct val="100%"/>
+              </a:lnSpc>
+              <a:defRPr sz="800" b="1">
+                <a:solidFill>
+                  <a:srgbClr val="000000"/>
+                </a:solidFill>
+                <a:latin typeface="Times New Roman"/>
+                <a:ea typeface="Times New Roman"/>
+                <a:cs typeface="Times New Roman"/>
+              </a:defRPr>
+            </a:pPr>
+            <a:r>
+              <a:rPr sz="800" b="1">
+                <a:latin typeface="Times New Roman"/>
+                <a:ea typeface="Times New Roman"/>
+                <a:cs typeface="Times New Roman"/>
+              </a:rPr>
+              <a:t>Ovos</a:t>
+            </a:r>
+          </a:p>
+        </p:txBody>
+      </p:sp>
+      <p:sp>
+        <p:nvSpPr>
+          <p:cNvPr id="42507975" name="Text">
+    </p:cNvPr>
+          <p:cNvSpPr>
+            <a:spLocks noGrp="1"/>
+          </p:cNvSpPr>
+          <p:nvPr/>
+        </p:nvSpPr>
+        <p:spPr>
+          <a:xfrm rot="0">
+            <a:off x="8204200" y="965200"/>
+            <a:ext cx="863600" cy="190500"/>
+          </a:xfrm>
+          <a:prstGeom prst="rect">
+            <a:avLst/>
+          </a:prstGeom>
+          <a:solidFill>
+            <a:srgbClr val="CCCCCC"/>
+          </a:solidFill>
+        </p:spPr>
+        <p:txBody>
+          <a:bodyPr wrap="square" lIns="0" tIns="0" rIns="0" bIns="0" rtlCol="0" anchor="ctr"/>
+          <a:lstStyle/>
+          <a:p>
+            <a:pPr algn="ctr">
+              <a:lnSpc>
+                <a:spcPct val="100%"/>
+              </a:lnSpc>
+              <a:defRPr sz="800" b="1">
+                <a:solidFill>
+                  <a:srgbClr val="000000"/>
+                </a:solidFill>
+                <a:latin typeface="Times New Roman"/>
+                <a:ea typeface="Times New Roman"/>
+                <a:cs typeface="Times New Roman"/>
+              </a:defRPr>
+            </a:pPr>
+            <a:r>
+              <a:rPr sz="800" b="1">
+                <a:latin typeface="Times New Roman"/>
+                <a:ea typeface="Times New Roman"/>
+                <a:cs typeface="Times New Roman"/>
+              </a:rPr>
+              <a:t>Temperos</a:t>
+            </a:r>
+          </a:p>
+        </p:txBody>
+      </p:sp>
+      <p:sp>
+        <p:nvSpPr>
+          <p:cNvPr id="817123283" name="Text">
+    </p:cNvPr>
+          <p:cNvSpPr>
+            <a:spLocks noGrp="1"/>
+          </p:cNvSpPr>
+          <p:nvPr/>
+        </p:nvSpPr>
+        <p:spPr>
+          <a:xfrm rot="0">
+            <a:off x="6477000" y="965200"/>
+            <a:ext cx="863600" cy="190500"/>
+          </a:xfrm>
+          <a:prstGeom prst="rect">
+            <a:avLst/>
+          </a:prstGeom>
+          <a:solidFill>
+            <a:srgbClr val="CCCCCC"/>
+          </a:solidFill>
+        </p:spPr>
+        <p:txBody>
+          <a:bodyPr wrap="square" lIns="0" tIns="0" rIns="0" bIns="0" rtlCol="0" anchor="ctr"/>
+          <a:lstStyle/>
+          <a:p>
+            <a:pPr algn="ctr">
+              <a:lnSpc>
+                <a:spcPct val="100%"/>
+              </a:lnSpc>
+              <a:defRPr sz="800" b="1">
+                <a:solidFill>
+                  <a:srgbClr val="000000"/>
+                </a:solidFill>
+                <a:latin typeface="Times New Roman"/>
+                <a:ea typeface="Times New Roman"/>
+                <a:cs typeface="Times New Roman"/>
+              </a:defRPr>
+            </a:pPr>
+            <a:r>
+              <a:rPr sz="800" b="1">
+                <a:latin typeface="Times New Roman"/>
+                <a:ea typeface="Times New Roman"/>
+                <a:cs typeface="Times New Roman"/>
+              </a:rPr>
+              <a:t>Enchidos</a:t>
+            </a:r>
+          </a:p>
+        </p:txBody>
+      </p:sp>
+      <p:sp>
+        <p:nvSpPr>
+          <p:cNvPr id="229758931" name="Text">
+    </p:cNvPr>
+          <p:cNvSpPr>
+            <a:spLocks noGrp="1"/>
+          </p:cNvSpPr>
+          <p:nvPr/>
+        </p:nvSpPr>
+        <p:spPr>
+          <a:xfrm rot="0">
+            <a:off x="3022600" y="965200"/>
+            <a:ext cx="863600" cy="190500"/>
+          </a:xfrm>
+          <a:prstGeom prst="rect">
+            <a:avLst/>
+          </a:prstGeom>
+          <a:solidFill>
+            <a:srgbClr val="CCCCCC"/>
+          </a:solidFill>
+        </p:spPr>
+        <p:txBody>
+          <a:bodyPr wrap="square" lIns="0" tIns="0" rIns="0" bIns="0" rtlCol="0" anchor="ctr"/>
+          <a:lstStyle/>
+          <a:p>
+            <a:pPr algn="ctr">
+              <a:lnSpc>
+                <a:spcPct val="100%"/>
+              </a:lnSpc>
+              <a:defRPr sz="800" b="1">
+                <a:solidFill>
+                  <a:srgbClr val="000000"/>
+                </a:solidFill>
+                <a:latin typeface="Times New Roman"/>
+                <a:ea typeface="Times New Roman"/>
+                <a:cs typeface="Times New Roman"/>
+              </a:defRPr>
+            </a:pPr>
+            <a:r>
+              <a:rPr sz="800" b="1">
+                <a:latin typeface="Times New Roman"/>
+                <a:ea typeface="Times New Roman"/>
+                <a:cs typeface="Times New Roman"/>
+              </a:rPr>
+              <a:t>Carne Caprina</a:t>
+            </a:r>
+          </a:p>
+        </p:txBody>
+      </p:sp>
+      <p:sp>
+        <p:nvSpPr>
+          <p:cNvPr id="1271546842" name="Text">
+    </p:cNvPr>
+          <p:cNvSpPr>
+            <a:spLocks noGrp="1"/>
+          </p:cNvSpPr>
+          <p:nvPr/>
+        </p:nvSpPr>
+        <p:spPr>
+          <a:xfrm rot="0">
+            <a:off x="939800" y="1155700"/>
+            <a:ext cx="355600" cy="152400"/>
+          </a:xfrm>
+          <a:prstGeom prst="rect">
+            <a:avLst/>
+          </a:prstGeom>
+          <a:ln w="3175">
+            <a:solidFill>
+              <a:srgbClr val="000000"/>
+            </a:solidFill>
+            <a:prstDash val="solid"/>
+          </a:ln>
+        </p:spPr>
+        <p:txBody>
+          <a:bodyPr wrap="square" lIns="0" tIns="0" rIns="0" bIns="0" rtlCol="0" anchor="ctr"/>
+          <a:lstStyle/>
+          <a:p>
+            <a:pPr algn="ctr">
+              <a:lnSpc>
+                <a:spcPct val="100%"/>
+              </a:lnSpc>
+              <a:defRPr sz="1000">
+                <a:solidFill>
+                  <a:srgbClr val="000000"/>
+                </a:solidFill>
+                <a:latin typeface="Times New Roman"/>
+                <a:ea typeface="Times New Roman"/>
+                <a:cs typeface="Times New Roman"/>
+              </a:defRPr>
+            </a:pPr>
+            <a:r>
+              <a:rPr sz="1000">
+                <a:latin typeface="Times New Roman"/>
+                <a:ea typeface="Times New Roman"/>
+                <a:cs typeface="Times New Roman"/>
+              </a:rPr>
+              <a:t>1</a:t>
+            </a:r>
+          </a:p>
+        </p:txBody>
+      </p:sp>
+      <p:sp>
+        <p:nvSpPr>
+          <p:cNvPr id="233996994" name="Text">
+    </p:cNvPr>
+          <p:cNvSpPr>
+            <a:spLocks noGrp="1"/>
+          </p:cNvSpPr>
+          <p:nvPr/>
+        </p:nvSpPr>
+        <p:spPr>
+          <a:xfrm rot="0">
+            <a:off x="1295400" y="1155700"/>
+            <a:ext cx="863600" cy="152400"/>
+          </a:xfrm>
+          <a:prstGeom prst="rect">
+            <a:avLst/>
+          </a:prstGeom>
+          <a:ln w="3175">
+            <a:solidFill>
+              <a:srgbClr val="000000"/>
+            </a:solidFill>
+            <a:prstDash val="solid"/>
+          </a:ln>
+        </p:spPr>
+        <p:txBody>
+          <a:bodyPr wrap="square" lIns="0" tIns="0" rIns="25400" bIns="0" rtlCol="0" anchor="ctr"/>
+          <a:lstStyle/>
+          <a:p>
+            <a:pPr algn="r">
+              <a:lnSpc>
+                <a:spcPct val="100%"/>
+              </a:lnSpc>
+              <a:defRPr sz="1000">
+                <a:solidFill>
+                  <a:srgbClr val="000000"/>
+                </a:solidFill>
+                <a:latin typeface="Times New Roman"/>
+                <a:ea typeface="Times New Roman"/>
+                <a:cs typeface="Times New Roman"/>
+              </a:defRPr>
+            </a:pPr>
+            <a:r>
+              <a:rPr sz="1000">
+                <a:latin typeface="Times New Roman"/>
+                <a:ea typeface="Times New Roman"/>
+                <a:cs typeface="Times New Roman"/>
+              </a:rPr>
+              <a:t>6,750.00</a:t>
+            </a:r>
+          </a:p>
+        </p:txBody>
+      </p:sp>
+      <p:sp>
+        <p:nvSpPr>
+          <p:cNvPr id="522882680" name="Text">
+    </p:cNvPr>
+          <p:cNvSpPr>
+            <a:spLocks noGrp="1"/>
+          </p:cNvSpPr>
+          <p:nvPr/>
+        </p:nvSpPr>
+        <p:spPr>
+          <a:xfrm rot="0">
+            <a:off x="3886200" y="1155700"/>
+            <a:ext cx="863600" cy="152400"/>
+          </a:xfrm>
+          <a:prstGeom prst="rect">
+            <a:avLst/>
+          </a:prstGeom>
+          <a:ln w="3175">
+            <a:solidFill>
+              <a:srgbClr val="000000"/>
+            </a:solidFill>
+            <a:prstDash val="solid"/>
+          </a:ln>
+        </p:spPr>
+        <p:txBody>
+          <a:bodyPr wrap="square" lIns="0" tIns="0" rIns="25400" bIns="0" rtlCol="0" anchor="ctr"/>
+          <a:lstStyle/>
+          <a:p>
+            <a:pPr algn="r">
+              <a:lnSpc>
+                <a:spcPct val="100%"/>
+              </a:lnSpc>
+              <a:defRPr sz="1000">
+                <a:solidFill>
+                  <a:srgbClr val="000000"/>
+                </a:solidFill>
+                <a:latin typeface="Times New Roman"/>
+                <a:ea typeface="Times New Roman"/>
+                <a:cs typeface="Times New Roman"/>
+              </a:defRPr>
+            </a:pPr>
+            <a:r>
+              <a:rPr sz="1000">
+                <a:latin typeface="Times New Roman"/>
+                <a:ea typeface="Times New Roman"/>
+                <a:cs typeface="Times New Roman"/>
+              </a:rPr>
+              <a:t>0.00</a:t>
+            </a:r>
+          </a:p>
+        </p:txBody>
+      </p:sp>
+      <p:sp>
+        <p:nvSpPr>
+          <p:cNvPr id="472308993" name="Text">
+    </p:cNvPr>
+          <p:cNvSpPr>
+            <a:spLocks noGrp="1"/>
+          </p:cNvSpPr>
+          <p:nvPr/>
+        </p:nvSpPr>
+        <p:spPr>
+          <a:xfrm rot="0">
+            <a:off x="2159000" y="1155700"/>
+            <a:ext cx="863600" cy="152400"/>
+          </a:xfrm>
+          <a:prstGeom prst="rect">
+            <a:avLst/>
+          </a:prstGeom>
+          <a:ln w="3175">
+            <a:solidFill>
+              <a:srgbClr val="000000"/>
+            </a:solidFill>
+            <a:prstDash val="solid"/>
+          </a:ln>
+        </p:spPr>
+        <p:txBody>
+          <a:bodyPr wrap="square" lIns="0" tIns="0" rIns="25400" bIns="0" rtlCol="0" anchor="ctr"/>
+          <a:lstStyle/>
+          <a:p>
+            <a:pPr algn="r">
+              <a:lnSpc>
+                <a:spcPct val="100%"/>
+              </a:lnSpc>
+              <a:defRPr sz="1000">
+                <a:solidFill>
+                  <a:srgbClr val="000000"/>
+                </a:solidFill>
+                <a:latin typeface="Times New Roman"/>
+                <a:ea typeface="Times New Roman"/>
+                <a:cs typeface="Times New Roman"/>
+              </a:defRPr>
+            </a:pPr>
+            <a:r>
+              <a:rPr sz="1000">
+                <a:latin typeface="Times New Roman"/>
+                <a:ea typeface="Times New Roman"/>
+                <a:cs typeface="Times New Roman"/>
+              </a:rPr>
+              <a:t>0.00</a:t>
+            </a:r>
+          </a:p>
+        </p:txBody>
+      </p:sp>
+      <p:sp>
+        <p:nvSpPr>
+          <p:cNvPr id="90933708" name="Text">
+    </p:cNvPr>
+          <p:cNvSpPr>
+            <a:spLocks noGrp="1"/>
+          </p:cNvSpPr>
+          <p:nvPr/>
+        </p:nvSpPr>
+        <p:spPr>
+          <a:xfrm rot="0">
+            <a:off x="254000" y="1155700"/>
+            <a:ext cx="685800" cy="152400"/>
+          </a:xfrm>
+          <a:prstGeom prst="rect">
+            <a:avLst/>
+          </a:prstGeom>
+          <a:ln w="3175">
+            <a:solidFill>
+              <a:srgbClr val="000000"/>
+            </a:solidFill>
+            <a:prstDash val="solid"/>
+          </a:ln>
+        </p:spPr>
+        <p:txBody>
+          <a:bodyPr wrap="square" lIns="0" tIns="0" rIns="0" bIns="0" rtlCol="0" anchor="ctr"/>
+          <a:lstStyle/>
+          <a:p>
+            <a:pPr algn="ctr">
+              <a:lnSpc>
+                <a:spcPct val="100%"/>
+              </a:lnSpc>
+              <a:defRPr sz="1000">
+                <a:solidFill>
+                  <a:srgbClr val="000000"/>
+                </a:solidFill>
+                <a:latin typeface="Times New Roman"/>
+                <a:ea typeface="Times New Roman"/>
+                <a:cs typeface="Times New Roman"/>
+              </a:defRPr>
+            </a:pPr>
+            <a:r>
+              <a:rPr sz="1000">
+                <a:latin typeface="Times New Roman"/>
+                <a:ea typeface="Times New Roman"/>
+                <a:cs typeface="Times New Roman"/>
+              </a:rPr>
+              <a:t>18/12/2025</a:t>
+            </a:r>
+          </a:p>
+        </p:txBody>
+      </p:sp>
+      <p:sp>
+        <p:nvSpPr>
+          <p:cNvPr id="479657777" name="Text">
+    </p:cNvPr>
+          <p:cNvSpPr>
+            <a:spLocks noGrp="1"/>
+          </p:cNvSpPr>
+          <p:nvPr/>
+        </p:nvSpPr>
+        <p:spPr>
+          <a:xfrm rot="0">
+            <a:off x="9067800" y="1155700"/>
+            <a:ext cx="1371600" cy="152400"/>
+          </a:xfrm>
+          <a:prstGeom prst="rect">
+            <a:avLst/>
+          </a:prstGeom>
+          <a:solidFill>
+            <a:srgbClr val="CCFFFF"/>
+          </a:solidFill>
+          <a:ln w="3175">
+            <a:solidFill>
+              <a:srgbClr val="000000"/>
+            </a:solidFill>
+            <a:prstDash val="solid"/>
+          </a:ln>
+        </p:spPr>
+        <p:txBody>
+          <a:bodyPr wrap="square" lIns="0" tIns="0" rIns="25400" bIns="0" rtlCol="0" anchor="ctr"/>
+          <a:lstStyle/>
+          <a:p>
+            <a:pPr algn="r">
+              <a:lnSpc>
+                <a:spcPct val="100%"/>
+              </a:lnSpc>
+              <a:defRPr sz="1000" b="1">
+                <a:solidFill>
+                  <a:srgbClr val="000000"/>
+                </a:solidFill>
+                <a:latin typeface="Times New Roman"/>
+                <a:ea typeface="Times New Roman"/>
+                <a:cs typeface="Times New Roman"/>
+              </a:defRPr>
+            </a:pPr>
+            <a:r>
+              <a:rPr sz="1000" b="1">
+                <a:latin typeface="Times New Roman"/>
+                <a:ea typeface="Times New Roman"/>
+                <a:cs typeface="Times New Roman"/>
+              </a:rPr>
+              <a:t>8,850.00</a:t>
+            </a:r>
+          </a:p>
+        </p:txBody>
+      </p:sp>
+      <p:sp>
+        <p:nvSpPr>
+          <p:cNvPr id="1459940245" name="Text">
+    </p:cNvPr>
+          <p:cNvSpPr>
+            <a:spLocks noGrp="1"/>
+          </p:cNvSpPr>
+          <p:nvPr/>
+        </p:nvSpPr>
+        <p:spPr>
+          <a:xfrm rot="0">
+            <a:off x="4749800" y="1155700"/>
+            <a:ext cx="863600" cy="152400"/>
+          </a:xfrm>
+          <a:prstGeom prst="rect">
+            <a:avLst/>
+          </a:prstGeom>
+          <a:ln w="3175">
+            <a:solidFill>
+              <a:srgbClr val="000000"/>
+            </a:solidFill>
+            <a:prstDash val="solid"/>
+          </a:ln>
+        </p:spPr>
+        <p:txBody>
+          <a:bodyPr wrap="square" lIns="0" tIns="0" rIns="25400" bIns="0" rtlCol="0" anchor="ctr"/>
+          <a:lstStyle/>
+          <a:p>
+            <a:pPr algn="r">
+              <a:lnSpc>
+                <a:spcPct val="100%"/>
+              </a:lnSpc>
+              <a:defRPr sz="1000">
+                <a:solidFill>
+                  <a:srgbClr val="000000"/>
+                </a:solidFill>
+                <a:latin typeface="Times New Roman"/>
+                <a:ea typeface="Times New Roman"/>
+                <a:cs typeface="Times New Roman"/>
+              </a:defRPr>
+            </a:pPr>
+            <a:r>
+              <a:rPr sz="1000">
+                <a:latin typeface="Times New Roman"/>
+                <a:ea typeface="Times New Roman"/>
+                <a:cs typeface="Times New Roman"/>
+              </a:rPr>
+              <a:t>0.00</a:t>
+            </a:r>
+          </a:p>
+        </p:txBody>
+      </p:sp>
+      <p:sp>
+        <p:nvSpPr>
+          <p:cNvPr id="2103503521" name="Text">
+    </p:cNvPr>
+          <p:cNvSpPr>
+            <a:spLocks noGrp="1"/>
+          </p:cNvSpPr>
+          <p:nvPr/>
+        </p:nvSpPr>
+        <p:spPr>
+          <a:xfrm rot="0">
+            <a:off x="7340600" y="1155700"/>
+            <a:ext cx="863600" cy="152400"/>
+          </a:xfrm>
+          <a:prstGeom prst="rect">
+            <a:avLst/>
+          </a:prstGeom>
+          <a:ln w="3175">
+            <a:solidFill>
+              <a:srgbClr val="000000"/>
+            </a:solidFill>
+            <a:prstDash val="solid"/>
+          </a:ln>
+        </p:spPr>
+        <p:txBody>
+          <a:bodyPr wrap="square" lIns="0" tIns="0" rIns="25400" bIns="0" rtlCol="0" anchor="ctr"/>
+          <a:lstStyle/>
+          <a:p>
+            <a:pPr algn="r">
+              <a:lnSpc>
+                <a:spcPct val="100%"/>
+              </a:lnSpc>
+              <a:defRPr sz="1000">
+                <a:solidFill>
+                  <a:srgbClr val="000000"/>
+                </a:solidFill>
+                <a:latin typeface="Times New Roman"/>
+                <a:ea typeface="Times New Roman"/>
+                <a:cs typeface="Times New Roman"/>
+              </a:defRPr>
+            </a:pPr>
+            <a:r>
+              <a:rPr sz="1000">
+                <a:latin typeface="Times New Roman"/>
+                <a:ea typeface="Times New Roman"/>
+                <a:cs typeface="Times New Roman"/>
+              </a:rPr>
+              <a:t>0.00</a:t>
+            </a:r>
+          </a:p>
+        </p:txBody>
+      </p:sp>
+      <p:sp>
+        <p:nvSpPr>
+          <p:cNvPr id="605825320" name="Text">
+    </p:cNvPr>
+          <p:cNvSpPr>
+            <a:spLocks noGrp="1"/>
+          </p:cNvSpPr>
+          <p:nvPr/>
+        </p:nvSpPr>
+        <p:spPr>
+          <a:xfrm rot="0">
+            <a:off x="8204200" y="1155700"/>
+            <a:ext cx="863600" cy="152400"/>
+          </a:xfrm>
+          <a:prstGeom prst="rect">
+            <a:avLst/>
+          </a:prstGeom>
+          <a:ln w="3175">
+            <a:solidFill>
+              <a:srgbClr val="000000"/>
+            </a:solidFill>
+            <a:prstDash val="solid"/>
+          </a:ln>
+        </p:spPr>
+        <p:txBody>
+          <a:bodyPr wrap="square" lIns="0" tIns="0" rIns="25400" bIns="0" rtlCol="0" anchor="ctr"/>
+          <a:lstStyle/>
+          <a:p>
+            <a:pPr algn="r">
+              <a:lnSpc>
+                <a:spcPct val="100%"/>
+              </a:lnSpc>
+              <a:defRPr sz="1000">
+                <a:solidFill>
+                  <a:srgbClr val="000000"/>
+                </a:solidFill>
+                <a:latin typeface="Times New Roman"/>
+                <a:ea typeface="Times New Roman"/>
+                <a:cs typeface="Times New Roman"/>
+              </a:defRPr>
+            </a:pPr>
+            <a:r>
+              <a:rPr sz="1000">
+                <a:latin typeface="Times New Roman"/>
+                <a:ea typeface="Times New Roman"/>
+                <a:cs typeface="Times New Roman"/>
+              </a:rPr>
+              <a:t>2,100.00</a:t>
+            </a:r>
+          </a:p>
+        </p:txBody>
+      </p:sp>
+      <p:sp>
+        <p:nvSpPr>
+          <p:cNvPr id="265827821" name="Text">
+    </p:cNvPr>
+          <p:cNvSpPr>
+            <a:spLocks noGrp="1"/>
+          </p:cNvSpPr>
+          <p:nvPr/>
+        </p:nvSpPr>
+        <p:spPr>
+          <a:xfrm rot="0">
+            <a:off x="5613400" y="1155700"/>
+            <a:ext cx="863600" cy="152400"/>
+          </a:xfrm>
+          <a:prstGeom prst="rect">
+            <a:avLst/>
+          </a:prstGeom>
+          <a:ln w="3175">
+            <a:solidFill>
+              <a:srgbClr val="000000"/>
+            </a:solidFill>
+            <a:prstDash val="solid"/>
+          </a:ln>
+        </p:spPr>
+        <p:txBody>
+          <a:bodyPr wrap="square" lIns="0" tIns="0" rIns="25400" bIns="0" rtlCol="0" anchor="ctr"/>
+          <a:lstStyle/>
+          <a:p>
+            <a:pPr algn="r">
+              <a:lnSpc>
+                <a:spcPct val="100%"/>
+              </a:lnSpc>
+              <a:defRPr sz="1000">
+                <a:solidFill>
+                  <a:srgbClr val="000000"/>
+                </a:solidFill>
+                <a:latin typeface="Times New Roman"/>
+                <a:ea typeface="Times New Roman"/>
+                <a:cs typeface="Times New Roman"/>
+              </a:defRPr>
+            </a:pPr>
+            <a:r>
+              <a:rPr sz="1000">
+                <a:latin typeface="Times New Roman"/>
+                <a:ea typeface="Times New Roman"/>
+                <a:cs typeface="Times New Roman"/>
+              </a:rPr>
+              <a:t>0.00</a:t>
+            </a:r>
+          </a:p>
+        </p:txBody>
+      </p:sp>
+      <p:sp>
+        <p:nvSpPr>
+          <p:cNvPr id="2138062784" name="Text">
+    </p:cNvPr>
+          <p:cNvSpPr>
+            <a:spLocks noGrp="1"/>
+          </p:cNvSpPr>
+          <p:nvPr/>
+        </p:nvSpPr>
+        <p:spPr>
+          <a:xfrm rot="0">
+            <a:off x="6477000" y="1155700"/>
+            <a:ext cx="863600" cy="152400"/>
+          </a:xfrm>
+          <a:prstGeom prst="rect">
+            <a:avLst/>
+          </a:prstGeom>
+          <a:ln w="3175">
+            <a:solidFill>
+              <a:srgbClr val="000000"/>
+            </a:solidFill>
+            <a:prstDash val="solid"/>
+          </a:ln>
+        </p:spPr>
+        <p:txBody>
+          <a:bodyPr wrap="square" lIns="0" tIns="0" rIns="25400" bIns="0" rtlCol="0" anchor="ctr"/>
+          <a:lstStyle/>
+          <a:p>
+            <a:pPr algn="r">
+              <a:lnSpc>
+                <a:spcPct val="100%"/>
+              </a:lnSpc>
+              <a:defRPr sz="1000">
+                <a:solidFill>
+                  <a:srgbClr val="000000"/>
+                </a:solidFill>
+                <a:latin typeface="Times New Roman"/>
+                <a:ea typeface="Times New Roman"/>
+                <a:cs typeface="Times New Roman"/>
+              </a:defRPr>
+            </a:pPr>
+            <a:r>
+              <a:rPr sz="1000">
+                <a:latin typeface="Times New Roman"/>
+                <a:ea typeface="Times New Roman"/>
+                <a:cs typeface="Times New Roman"/>
+              </a:rPr>
+              <a:t>0.00</a:t>
+            </a:r>
+          </a:p>
+        </p:txBody>
+      </p:sp>
+      <p:sp>
+        <p:nvSpPr>
+          <p:cNvPr id="88074093" name="Text">
+    </p:cNvPr>
+          <p:cNvSpPr>
+            <a:spLocks noGrp="1"/>
+          </p:cNvSpPr>
+          <p:nvPr/>
+        </p:nvSpPr>
+        <p:spPr>
+          <a:xfrm rot="0">
+            <a:off x="3022600" y="1155700"/>
+            <a:ext cx="863600" cy="152400"/>
+          </a:xfrm>
+          <a:prstGeom prst="rect">
+            <a:avLst/>
+          </a:prstGeom>
+          <a:ln w="3175">
+            <a:solidFill>
+              <a:srgbClr val="000000"/>
+            </a:solidFill>
+            <a:prstDash val="solid"/>
+          </a:ln>
+        </p:spPr>
+        <p:txBody>
+          <a:bodyPr wrap="square" lIns="0" tIns="0" rIns="25400" bIns="0" rtlCol="0" anchor="ctr"/>
+          <a:lstStyle/>
+          <a:p>
+            <a:pPr algn="r">
+              <a:lnSpc>
+                <a:spcPct val="100%"/>
+              </a:lnSpc>
+              <a:defRPr sz="1000">
+                <a:solidFill>
+                  <a:srgbClr val="000000"/>
+                </a:solidFill>
+                <a:latin typeface="Times New Roman"/>
+                <a:ea typeface="Times New Roman"/>
+                <a:cs typeface="Times New Roman"/>
+              </a:defRPr>
+            </a:pPr>
+            <a:r>
+              <a:rPr sz="1000">
+                <a:latin typeface="Times New Roman"/>
+                <a:ea typeface="Times New Roman"/>
+                <a:cs typeface="Times New Roman"/>
+              </a:rPr>
+              <a:t>0.00</a:t>
+            </a:r>
+          </a:p>
+        </p:txBody>
+      </p:sp>
+      <p:sp>
+        <p:nvSpPr>
+          <p:cNvPr id="1085266827" name="Text">
+    </p:cNvPr>
+          <p:cNvSpPr>
+            <a:spLocks noGrp="1"/>
+          </p:cNvSpPr>
+          <p:nvPr/>
+        </p:nvSpPr>
+        <p:spPr>
+          <a:xfrm rot="0">
+            <a:off x="254000" y="1308100"/>
+            <a:ext cx="1041400" cy="203200"/>
+          </a:xfrm>
+          <a:prstGeom prst="rect">
+            <a:avLst/>
+          </a:prstGeom>
+          <a:solidFill>
+            <a:srgbClr val="CCFFFF"/>
+          </a:solidFill>
+          <a:ln w="6350">
+            <a:solidFill>
+              <a:srgbClr val="000000"/>
+            </a:solidFill>
+            <a:prstDash val="solid"/>
+          </a:ln>
+        </p:spPr>
+        <p:txBody>
+          <a:bodyPr wrap="square" lIns="0" tIns="0" rIns="0" bIns="0" rtlCol="0" anchor="ctr"/>
+          <a:lstStyle/>
+          <a:p>
+            <a:pPr algn="ctr">
+              <a:lnSpc>
+                <a:spcPct val="100%"/>
+              </a:lnSpc>
+              <a:defRPr sz="1100" b="1">
+                <a:solidFill>
+                  <a:srgbClr val="000000"/>
+                </a:solidFill>
+                <a:latin typeface="Times New Roman"/>
+                <a:ea typeface="Times New Roman"/>
+                <a:cs typeface="Times New Roman"/>
+              </a:defRPr>
+            </a:pPr>
+            <a:r>
+              <a:rPr sz="1100" b="1">
+                <a:latin typeface="Times New Roman"/>
+                <a:ea typeface="Times New Roman"/>
+                <a:cs typeface="Times New Roman"/>
+              </a:rPr>
+              <a:t>Total Geral</a:t>
+            </a:r>
+          </a:p>
+        </p:txBody>
+      </p:sp>
+      <p:sp>
+        <p:nvSpPr>
+          <p:cNvPr id="244771118" name="Text">
+    </p:cNvPr>
+          <p:cNvSpPr>
+            <a:spLocks noGrp="1"/>
+          </p:cNvSpPr>
+          <p:nvPr/>
+        </p:nvSpPr>
+        <p:spPr>
+          <a:xfrm rot="0">
+            <a:off x="1295400" y="1308100"/>
+            <a:ext cx="863600" cy="203200"/>
+          </a:xfrm>
+          <a:prstGeom prst="rect">
+            <a:avLst/>
+          </a:prstGeom>
+          <a:solidFill>
+            <a:srgbClr val="CCFFFF"/>
+          </a:solidFill>
+          <a:ln w="3175">
+            <a:solidFill>
+              <a:srgbClr val="000000"/>
+            </a:solidFill>
+            <a:prstDash val="solid"/>
+          </a:ln>
+        </p:spPr>
+        <p:txBody>
+          <a:bodyPr wrap="square" lIns="0" tIns="0" rIns="25400" bIns="0" rtlCol="0" anchor="ctr"/>
+          <a:lstStyle/>
+          <a:p>
+            <a:pPr algn="r">
+              <a:lnSpc>
+                <a:spcPct val="100%"/>
+              </a:lnSpc>
+              <a:defRPr sz="500" b="1">
+                <a:solidFill>
+                  <a:srgbClr val="000000"/>
+                </a:solidFill>
+                <a:latin typeface="Times New Roman"/>
+                <a:ea typeface="Times New Roman"/>
+                <a:cs typeface="Times New Roman"/>
+              </a:defRPr>
+            </a:pPr>
+            <a:r>
+              <a:rPr sz="500" b="1">
+                <a:latin typeface="Times New Roman"/>
+                <a:ea typeface="Times New Roman"/>
+                <a:cs typeface="Times New Roman"/>
+              </a:rPr>
+              <a:t>6,750.00</a:t>
+            </a:r>
+          </a:p>
+        </p:txBody>
+      </p:sp>
+      <p:sp>
+        <p:nvSpPr>
+          <p:cNvPr id="1894140163" name="Text">
+    </p:cNvPr>
+          <p:cNvSpPr>
+            <a:spLocks noGrp="1"/>
+          </p:cNvSpPr>
+          <p:nvPr/>
+        </p:nvSpPr>
+        <p:spPr>
+          <a:xfrm rot="0">
+            <a:off x="3886200" y="1308100"/>
+            <a:ext cx="863600" cy="203200"/>
+          </a:xfrm>
+          <a:prstGeom prst="rect">
+            <a:avLst/>
+          </a:prstGeom>
+          <a:solidFill>
+            <a:srgbClr val="CCFFFF"/>
+          </a:solidFill>
+          <a:ln w="3175">
+            <a:solidFill>
+              <a:srgbClr val="000000"/>
+            </a:solidFill>
+            <a:prstDash val="solid"/>
+          </a:ln>
+        </p:spPr>
+        <p:txBody>
+          <a:bodyPr wrap="square" lIns="0" tIns="0" rIns="25400" bIns="0" rtlCol="0" anchor="ctr"/>
+          <a:lstStyle/>
+          <a:p>
+            <a:pPr algn="r">
+              <a:lnSpc>
+                <a:spcPct val="100%"/>
+              </a:lnSpc>
+              <a:defRPr sz="500" b="1">
+                <a:solidFill>
+                  <a:srgbClr val="000000"/>
+                </a:solidFill>
+                <a:latin typeface="Times New Roman"/>
+                <a:ea typeface="Times New Roman"/>
+                <a:cs typeface="Times New Roman"/>
+              </a:defRPr>
+            </a:pPr>
+            <a:r>
+              <a:rPr sz="500" b="1">
+                <a:latin typeface="Times New Roman"/>
+                <a:ea typeface="Times New Roman"/>
+                <a:cs typeface="Times New Roman"/>
+              </a:rPr>
+              <a:t>0.00</a:t>
+            </a:r>
+          </a:p>
+        </p:txBody>
+      </p:sp>
+      <p:sp>
+        <p:nvSpPr>
+          <p:cNvPr id="169397501" name="Text">
+    </p:cNvPr>
+          <p:cNvSpPr>
+            <a:spLocks noGrp="1"/>
+          </p:cNvSpPr>
+          <p:nvPr/>
+        </p:nvSpPr>
+        <p:spPr>
+          <a:xfrm rot="0">
+            <a:off x="4749800" y="1308100"/>
+            <a:ext cx="863600" cy="203200"/>
+          </a:xfrm>
+          <a:prstGeom prst="rect">
+            <a:avLst/>
+          </a:prstGeom>
+          <a:solidFill>
+            <a:srgbClr val="CCFFFF"/>
+          </a:solidFill>
+          <a:ln w="3175">
+            <a:solidFill>
+              <a:srgbClr val="000000"/>
+            </a:solidFill>
+            <a:prstDash val="solid"/>
+          </a:ln>
+        </p:spPr>
+        <p:txBody>
+          <a:bodyPr wrap="square" lIns="0" tIns="0" rIns="25400" bIns="0" rtlCol="0" anchor="ctr"/>
+          <a:lstStyle/>
+          <a:p>
+            <a:pPr algn="r">
+              <a:lnSpc>
+                <a:spcPct val="100%"/>
+              </a:lnSpc>
+              <a:defRPr sz="500" b="1">
+                <a:solidFill>
+                  <a:srgbClr val="000000"/>
+                </a:solidFill>
+                <a:latin typeface="Times New Roman"/>
+                <a:ea typeface="Times New Roman"/>
+                <a:cs typeface="Times New Roman"/>
+              </a:defRPr>
+            </a:pPr>
+            <a:r>
+              <a:rPr sz="500" b="1">
+                <a:latin typeface="Times New Roman"/>
+                <a:ea typeface="Times New Roman"/>
+                <a:cs typeface="Times New Roman"/>
+              </a:rPr>
+              <a:t>0.00</a:t>
+            </a:r>
+          </a:p>
+        </p:txBody>
+      </p:sp>
+      <p:sp>
+        <p:nvSpPr>
+          <p:cNvPr id="886386102" name="Text">
+    </p:cNvPr>
+          <p:cNvSpPr>
+            <a:spLocks noGrp="1"/>
+          </p:cNvSpPr>
+          <p:nvPr/>
+        </p:nvSpPr>
+        <p:spPr>
+          <a:xfrm rot="0">
+            <a:off x="9067800" y="1308100"/>
+            <a:ext cx="1371600" cy="203200"/>
+          </a:xfrm>
+          <a:prstGeom prst="rect">
+            <a:avLst/>
+          </a:prstGeom>
+          <a:solidFill>
+            <a:srgbClr val="99CCFF"/>
+          </a:solidFill>
+          <a:ln w="3175">
+            <a:solidFill>
+              <a:srgbClr val="000000"/>
+            </a:solidFill>
+            <a:prstDash val="solid"/>
+          </a:ln>
+        </p:spPr>
+        <p:txBody>
+          <a:bodyPr wrap="square" lIns="0" tIns="0" rIns="25400" bIns="0" rtlCol="0" anchor="ctr"/>
+          <a:lstStyle/>
+          <a:p>
+            <a:pPr algn="r">
+              <a:lnSpc>
+                <a:spcPct val="100%"/>
+              </a:lnSpc>
+              <a:defRPr sz="1000" b="1">
+                <a:solidFill>
+                  <a:srgbClr val="000000"/>
+                </a:solidFill>
+                <a:latin typeface="Times New Roman"/>
+                <a:ea typeface="Times New Roman"/>
+                <a:cs typeface="Times New Roman"/>
+              </a:defRPr>
+            </a:pPr>
+            <a:r>
+              <a:rPr sz="1000" b="1">
+                <a:latin typeface="Times New Roman"/>
+                <a:ea typeface="Times New Roman"/>
+                <a:cs typeface="Times New Roman"/>
+              </a:rPr>
+              <a:t>8,850.00</a:t>
+            </a:r>
+          </a:p>
+        </p:txBody>
+      </p:sp>
+      <p:sp>
+        <p:nvSpPr>
+          <p:cNvPr id="221474203" name="Rectangle"/>
+          <p:cNvSpPr>
+            <a:spLocks noGrp="1"/>
+          </p:cNvSpPr>
+          <p:nvPr/>
+        </p:nvSpPr>
+        <p:spPr>
+          <a:xfrm>
+            <a:off x="165100" y="1562100"/>
+            <a:ext cx="3759200" cy="571500"/>
+          </a:xfrm>
+          <a:prstGeom prst="rect">
+            <a:avLst/>
+          </a:prstGeom>
+        </p:spPr>
+        <p:txBody>
+          <a:bodyPr rtlCol="0" anchor="ctr"/>
+          <a:lstStyle/>
+          <a:p>
+            <a:pPr algn="ctr"/>
+          </a:p>
+        </p:txBody>
+      </p:sp>
+      <p:sp>
+        <p:nvSpPr>
+          <p:cNvPr id="1340052335" name="Text">
+    </p:cNvPr>
+          <p:cNvSpPr>
+            <a:spLocks noGrp="1"/>
+          </p:cNvSpPr>
+          <p:nvPr/>
+        </p:nvSpPr>
+        <p:spPr>
+          <a:xfrm rot="0">
+            <a:off x="1295400" y="1549400"/>
+            <a:ext cx="1727200" cy="203200"/>
+          </a:xfrm>
+          <a:prstGeom prst="rect">
+            <a:avLst/>
+          </a:prstGeom>
+          <a:solidFill>
+            <a:srgbClr val="CCFFFF"/>
+          </a:solidFill>
+          <a:ln w="3175">
+            <a:solidFill>
+              <a:srgbClr val="000000"/>
+            </a:solidFill>
+            <a:prstDash val="solid"/>
+          </a:ln>
+        </p:spPr>
+        <p:txBody>
+          <a:bodyPr wrap="square" lIns="0" tIns="0" rIns="25400" bIns="0" rtlCol="0" anchor="ctr"/>
+          <a:lstStyle/>
+          <a:p>
+            <a:pPr algn="r">
+              <a:lnSpc>
+                <a:spcPct val="100%"/>
+              </a:lnSpc>
+              <a:defRPr sz="1200" b="1">
+                <a:solidFill>
+                  <a:srgbClr val="000000"/>
+                </a:solidFill>
+                <a:latin typeface="Times New Roman"/>
+                <a:ea typeface="Times New Roman"/>
+                <a:cs typeface="Times New Roman"/>
+              </a:defRPr>
+            </a:pPr>
+            <a:r>
+              <a:rPr sz="1200" b="1">
+                <a:latin typeface="Times New Roman"/>
+                <a:ea typeface="Times New Roman"/>
+                <a:cs typeface="Times New Roman"/>
+              </a:rPr>
+              <a:t>7,750.00</a:t>
+            </a:r>
+          </a:p>
+        </p:txBody>
+      </p:sp>
+      <p:sp>
+        <p:nvSpPr>
+          <p:cNvPr id="65847629" name="Text">
+    </p:cNvPr>
+          <p:cNvSpPr>
+            <a:spLocks noGrp="1"/>
+          </p:cNvSpPr>
+          <p:nvPr/>
+        </p:nvSpPr>
+        <p:spPr>
+          <a:xfrm rot="0">
+            <a:off x="241300" y="1549400"/>
+            <a:ext cx="1054100" cy="203200"/>
+          </a:xfrm>
+          <a:prstGeom prst="rect">
+            <a:avLst/>
+          </a:prstGeom>
+          <a:solidFill>
+            <a:srgbClr val="FFFFFF"/>
+          </a:solidFill>
+        </p:spPr>
+        <p:txBody>
+          <a:bodyPr wrap="square" lIns="0" tIns="0" rIns="0" bIns="0" rtlCol="0" anchor="ctr"/>
+          <a:lstStyle/>
+          <a:p>
+            <a:pPr algn="ctr">
+              <a:lnSpc>
+                <a:spcPct val="100%"/>
+              </a:lnSpc>
+              <a:defRPr sz="1200" b="1">
+                <a:solidFill>
+                  <a:srgbClr val="000000"/>
+                </a:solidFill>
+                <a:latin typeface="Times New Roman"/>
+                <a:ea typeface="Times New Roman"/>
+                <a:cs typeface="Times New Roman"/>
+              </a:defRPr>
+            </a:pPr>
+            <a:r>
+              <a:rPr sz="1200" b="1">
+                <a:latin typeface="Times New Roman"/>
+                <a:ea typeface="Times New Roman"/>
+                <a:cs typeface="Times New Roman"/>
+              </a:rPr>
+              <a:t>Numerário</a:t>
+            </a:r>
+          </a:p>
+        </p:txBody>
+      </p:sp>
+      <p:sp>
+        <p:nvSpPr>
+          <p:cNvPr id="516547611" name="Text">
+    </p:cNvPr>
+          <p:cNvSpPr>
+            <a:spLocks noGrp="1"/>
+          </p:cNvSpPr>
+          <p:nvPr/>
+        </p:nvSpPr>
+        <p:spPr>
+          <a:xfrm rot="0">
+            <a:off x="1295400" y="1739900"/>
+            <a:ext cx="1727200" cy="203200"/>
+          </a:xfrm>
+          <a:prstGeom prst="rect">
+            <a:avLst/>
+          </a:prstGeom>
+          <a:solidFill>
+            <a:srgbClr val="CCFFFF"/>
+          </a:solidFill>
+          <a:ln w="3175">
+            <a:solidFill>
+              <a:srgbClr val="000000"/>
+            </a:solidFill>
+            <a:prstDash val="solid"/>
+          </a:ln>
+        </p:spPr>
+        <p:txBody>
+          <a:bodyPr wrap="square" lIns="0" tIns="0" rIns="25400" bIns="0" rtlCol="0" anchor="ctr"/>
+          <a:lstStyle/>
+          <a:p>
+            <a:pPr algn="r">
+              <a:lnSpc>
+                <a:spcPct val="100%"/>
+              </a:lnSpc>
+              <a:defRPr sz="1200" b="1">
+                <a:solidFill>
+                  <a:srgbClr val="000000"/>
+                </a:solidFill>
+                <a:latin typeface="Times New Roman"/>
+                <a:ea typeface="Times New Roman"/>
+                <a:cs typeface="Times New Roman"/>
+              </a:defRPr>
+            </a:pPr>
+            <a:r>
+              <a:rPr sz="1200" b="1">
+                <a:latin typeface="Times New Roman"/>
+                <a:ea typeface="Times New Roman"/>
+                <a:cs typeface="Times New Roman"/>
+              </a:rPr>
+              <a:t>7,800.00</a:t>
+            </a:r>
+          </a:p>
+        </p:txBody>
+      </p:sp>
+      <p:sp>
+        <p:nvSpPr>
+          <p:cNvPr id="134225388" name="Text">
+    </p:cNvPr>
+          <p:cNvSpPr>
+            <a:spLocks noGrp="1"/>
+          </p:cNvSpPr>
+          <p:nvPr/>
+        </p:nvSpPr>
+        <p:spPr>
+          <a:xfrm rot="0">
+            <a:off x="241300" y="1739900"/>
+            <a:ext cx="1054100" cy="203200"/>
+          </a:xfrm>
+          <a:prstGeom prst="rect">
+            <a:avLst/>
+          </a:prstGeom>
+          <a:solidFill>
+            <a:srgbClr val="FFFFFF"/>
+          </a:solidFill>
+        </p:spPr>
+        <p:txBody>
+          <a:bodyPr wrap="square" lIns="0" tIns="0" rIns="0" bIns="0" rtlCol="0" anchor="ctr"/>
+          <a:lstStyle/>
+          <a:p>
+            <a:pPr algn="ctr">
+              <a:lnSpc>
+                <a:spcPct val="100%"/>
+              </a:lnSpc>
+              <a:defRPr sz="1200" b="1">
+                <a:solidFill>
+                  <a:srgbClr val="000000"/>
+                </a:solidFill>
+                <a:latin typeface="Times New Roman"/>
+                <a:ea typeface="Times New Roman"/>
+                <a:cs typeface="Times New Roman"/>
+              </a:defRPr>
+            </a:pPr>
+            <a:r>
+              <a:rPr sz="1200" b="1">
+                <a:latin typeface="Times New Roman"/>
+                <a:ea typeface="Times New Roman"/>
+                <a:cs typeface="Times New Roman"/>
+              </a:rPr>
+              <a:t>Cartão</a:t>
+            </a:r>
+          </a:p>
+        </p:txBody>
+      </p:sp>
+      <p:sp>
+        <p:nvSpPr>
+          <p:cNvPr id="1006089064" name="Text">
+    </p:cNvPr>
+          <p:cNvSpPr>
+            <a:spLocks noGrp="1"/>
+          </p:cNvSpPr>
+          <p:nvPr/>
+        </p:nvSpPr>
+        <p:spPr>
+          <a:xfrm rot="0">
+            <a:off x="1295400" y="1943100"/>
+            <a:ext cx="1727200" cy="190500"/>
+          </a:xfrm>
+          <a:prstGeom prst="rect">
+            <a:avLst/>
+          </a:prstGeom>
+          <a:solidFill>
+            <a:srgbClr val="99CCFF"/>
+          </a:solidFill>
+          <a:ln w="3175">
+            <a:solidFill>
+              <a:srgbClr val="000000"/>
+            </a:solidFill>
+            <a:prstDash val="solid"/>
+          </a:ln>
+        </p:spPr>
+        <p:txBody>
+          <a:bodyPr wrap="square" lIns="0" tIns="0" rIns="25400" bIns="0" rtlCol="0" anchor="ctr"/>
+          <a:lstStyle/>
+          <a:p>
+            <a:pPr algn="r">
+              <a:lnSpc>
+                <a:spcPct val="100%"/>
+              </a:lnSpc>
+              <a:defRPr sz="1300" b="1">
+                <a:solidFill>
+                  <a:srgbClr val="000000"/>
+                </a:solidFill>
+                <a:latin typeface="Times New Roman"/>
+                <a:ea typeface="Times New Roman"/>
+                <a:cs typeface="Times New Roman"/>
+              </a:defRPr>
+            </a:pPr>
+            <a:r>
+              <a:rPr sz="1300" b="1">
+                <a:latin typeface="Times New Roman"/>
+                <a:ea typeface="Times New Roman"/>
+                <a:cs typeface="Times New Roman"/>
+              </a:rPr>
+              <a:t>15,550.00</a:t>
+            </a:r>
+          </a:p>
+        </p:txBody>
+      </p:sp>
+      <p:sp>
+        <p:nvSpPr>
+          <p:cNvPr id="1584720882" name="Text">
+    </p:cNvPr>
+          <p:cNvSpPr>
+            <a:spLocks noGrp="1"/>
+          </p:cNvSpPr>
+          <p:nvPr/>
+        </p:nvSpPr>
+        <p:spPr>
+          <a:xfrm rot="0">
+            <a:off x="241300" y="1943100"/>
+            <a:ext cx="1054100" cy="190500"/>
+          </a:xfrm>
+          <a:prstGeom prst="rect">
+            <a:avLst/>
+          </a:prstGeom>
+          <a:solidFill>
+            <a:srgbClr val="FFFFFF"/>
+          </a:solidFill>
+        </p:spPr>
+        <p:txBody>
+          <a:bodyPr wrap="square" lIns="0" tIns="0" rIns="0" bIns="0" rtlCol="0" anchor="ctr"/>
+          <a:lstStyle/>
+          <a:p>
+            <a:pPr algn="ctr">
+              <a:lnSpc>
+                <a:spcPct val="100%"/>
+              </a:lnSpc>
+              <a:defRPr sz="1300" b="1">
+                <a:solidFill>
+                  <a:srgbClr val="000000"/>
+                </a:solidFill>
+                <a:latin typeface="Times New Roman"/>
+                <a:ea typeface="Times New Roman"/>
+                <a:cs typeface="Times New Roman"/>
+              </a:defRPr>
+            </a:pPr>
+            <a:r>
+              <a:rPr sz="1300" b="1">
+                <a:latin typeface="Times New Roman"/>
+                <a:ea typeface="Times New Roman"/>
+                <a:cs typeface="Times New Roman"/>
+              </a:rPr>
+              <a:t>Total</a:t>
+            </a:r>
+          </a:p>
+        </p:txBody>
+      </p:sp>
+      <p:sp>
+        <p:nvSpPr>
+          <p:cNvPr id="256648475" name="Text">
+    </p:cNvPr>
+          <p:cNvSpPr>
+            <a:spLocks noGrp="1"/>
+          </p:cNvSpPr>
+          <p:nvPr/>
+        </p:nvSpPr>
+        <p:spPr>
+          <a:xfrm rot="0">
+            <a:off x="7340600" y="1308100"/>
+            <a:ext cx="863600" cy="203200"/>
+          </a:xfrm>
+          <a:prstGeom prst="rect">
+            <a:avLst/>
+          </a:prstGeom>
+          <a:solidFill>
+            <a:srgbClr val="CCFFFF"/>
+          </a:solidFill>
+          <a:ln w="3175">
+            <a:solidFill>
+              <a:srgbClr val="000000"/>
+            </a:solidFill>
+            <a:prstDash val="solid"/>
+          </a:ln>
+        </p:spPr>
+        <p:txBody>
+          <a:bodyPr wrap="square" lIns="0" tIns="0" rIns="25400" bIns="0" rtlCol="0" anchor="ctr"/>
+          <a:lstStyle/>
+          <a:p>
+            <a:pPr algn="r">
+              <a:lnSpc>
+                <a:spcPct val="100%"/>
+              </a:lnSpc>
+              <a:defRPr sz="500" b="1">
+                <a:solidFill>
+                  <a:srgbClr val="000000"/>
+                </a:solidFill>
+                <a:latin typeface="Times New Roman"/>
+                <a:ea typeface="Times New Roman"/>
+                <a:cs typeface="Times New Roman"/>
+              </a:defRPr>
+            </a:pPr>
+            <a:r>
+              <a:rPr sz="500" b="1">
+                <a:latin typeface="Times New Roman"/>
+                <a:ea typeface="Times New Roman"/>
+                <a:cs typeface="Times New Roman"/>
+              </a:rPr>
+              <a:t>0.00</a:t>
+            </a:r>
+          </a:p>
+        </p:txBody>
+      </p:sp>
+      <p:sp>
+        <p:nvSpPr>
+          <p:cNvPr id="128693859" name="Text">
+    </p:cNvPr>
+          <p:cNvSpPr>
+            <a:spLocks noGrp="1"/>
+          </p:cNvSpPr>
+          <p:nvPr/>
+        </p:nvSpPr>
+        <p:spPr>
+          <a:xfrm rot="0">
+            <a:off x="2159000" y="1308100"/>
+            <a:ext cx="863600" cy="203200"/>
+          </a:xfrm>
+          <a:prstGeom prst="rect">
+            <a:avLst/>
+          </a:prstGeom>
+          <a:solidFill>
+            <a:srgbClr val="CCFFFF"/>
+          </a:solidFill>
+          <a:ln w="3175">
+            <a:solidFill>
+              <a:srgbClr val="000000"/>
+            </a:solidFill>
+            <a:prstDash val="solid"/>
+          </a:ln>
+        </p:spPr>
+        <p:txBody>
+          <a:bodyPr wrap="square" lIns="0" tIns="0" rIns="25400" bIns="0" rtlCol="0" anchor="ctr"/>
+          <a:lstStyle/>
+          <a:p>
+            <a:pPr algn="r">
+              <a:lnSpc>
+                <a:spcPct val="100%"/>
+              </a:lnSpc>
+              <a:defRPr sz="500" b="1">
+                <a:solidFill>
+                  <a:srgbClr val="000000"/>
+                </a:solidFill>
+                <a:latin typeface="Times New Roman"/>
+                <a:ea typeface="Times New Roman"/>
+                <a:cs typeface="Times New Roman"/>
+              </a:defRPr>
+            </a:pPr>
+            <a:r>
+              <a:rPr sz="500" b="1">
+                <a:latin typeface="Times New Roman"/>
+                <a:ea typeface="Times New Roman"/>
+                <a:cs typeface="Times New Roman"/>
+              </a:rPr>
+              <a:t>0.00</a:t>
+            </a:r>
+          </a:p>
+        </p:txBody>
+      </p:sp>
+      <p:sp>
+        <p:nvSpPr>
+          <p:cNvPr id="29436173" name="Text">
+    </p:cNvPr>
+          <p:cNvSpPr>
+            <a:spLocks noGrp="1"/>
+          </p:cNvSpPr>
+          <p:nvPr/>
+        </p:nvSpPr>
+        <p:spPr>
+          <a:xfrm rot="0">
+            <a:off x="5613400" y="1308100"/>
+            <a:ext cx="863600" cy="203200"/>
+          </a:xfrm>
+          <a:prstGeom prst="rect">
+            <a:avLst/>
+          </a:prstGeom>
+          <a:solidFill>
+            <a:srgbClr val="CCFFFF"/>
+          </a:solidFill>
+          <a:ln w="3175">
+            <a:solidFill>
+              <a:srgbClr val="000000"/>
+            </a:solidFill>
+            <a:prstDash val="solid"/>
+          </a:ln>
+        </p:spPr>
+        <p:txBody>
+          <a:bodyPr wrap="square" lIns="0" tIns="0" rIns="25400" bIns="0" rtlCol="0" anchor="ctr"/>
+          <a:lstStyle/>
+          <a:p>
+            <a:pPr algn="r">
+              <a:lnSpc>
+                <a:spcPct val="100%"/>
+              </a:lnSpc>
+              <a:defRPr sz="500" b="1">
+                <a:solidFill>
+                  <a:srgbClr val="000000"/>
+                </a:solidFill>
+                <a:latin typeface="Times New Roman"/>
+                <a:ea typeface="Times New Roman"/>
+                <a:cs typeface="Times New Roman"/>
+              </a:defRPr>
+            </a:pPr>
+            <a:r>
+              <a:rPr sz="500" b="1">
+                <a:latin typeface="Times New Roman"/>
+                <a:ea typeface="Times New Roman"/>
+                <a:cs typeface="Times New Roman"/>
+              </a:rPr>
+              <a:t>0.00</a:t>
+            </a:r>
+          </a:p>
+        </p:txBody>
+      </p:sp>
+      <p:sp>
+        <p:nvSpPr>
+          <p:cNvPr id="2022930876" name="Text">
+    </p:cNvPr>
+          <p:cNvSpPr>
+            <a:spLocks noGrp="1"/>
+          </p:cNvSpPr>
+          <p:nvPr/>
+        </p:nvSpPr>
+        <p:spPr>
+          <a:xfrm rot="0">
+            <a:off x="8204200" y="1308100"/>
+            <a:ext cx="863600" cy="203200"/>
+          </a:xfrm>
+          <a:prstGeom prst="rect">
+            <a:avLst/>
+          </a:prstGeom>
+          <a:solidFill>
+            <a:srgbClr val="CCFFFF"/>
+          </a:solidFill>
+          <a:ln w="3175">
+            <a:solidFill>
+              <a:srgbClr val="000000"/>
+            </a:solidFill>
+            <a:prstDash val="solid"/>
+          </a:ln>
+        </p:spPr>
+        <p:txBody>
+          <a:bodyPr wrap="square" lIns="0" tIns="0" rIns="25400" bIns="0" rtlCol="0" anchor="ctr"/>
+          <a:lstStyle/>
+          <a:p>
+            <a:pPr algn="r">
+              <a:lnSpc>
+                <a:spcPct val="100%"/>
+              </a:lnSpc>
+              <a:defRPr sz="500" b="1">
+                <a:solidFill>
+                  <a:srgbClr val="000000"/>
+                </a:solidFill>
+                <a:latin typeface="Times New Roman"/>
+                <a:ea typeface="Times New Roman"/>
+                <a:cs typeface="Times New Roman"/>
+              </a:defRPr>
+            </a:pPr>
+            <a:r>
+              <a:rPr sz="500" b="1">
+                <a:latin typeface="Times New Roman"/>
+                <a:ea typeface="Times New Roman"/>
+                <a:cs typeface="Times New Roman"/>
+              </a:rPr>
+              <a:t>2,100.00</a:t>
+            </a:r>
+          </a:p>
+        </p:txBody>
+      </p:sp>
+      <p:sp>
+        <p:nvSpPr>
+          <p:cNvPr id="379187016" name="Text">
+    </p:cNvPr>
+          <p:cNvSpPr>
+            <a:spLocks noGrp="1"/>
+          </p:cNvSpPr>
+          <p:nvPr/>
+        </p:nvSpPr>
+        <p:spPr>
+          <a:xfrm rot="0">
+            <a:off x="6477000" y="1308100"/>
+            <a:ext cx="863600" cy="203200"/>
+          </a:xfrm>
+          <a:prstGeom prst="rect">
+            <a:avLst/>
+          </a:prstGeom>
+          <a:solidFill>
+            <a:srgbClr val="CCFFFF"/>
+          </a:solidFill>
+          <a:ln w="3175">
+            <a:solidFill>
+              <a:srgbClr val="000000"/>
+            </a:solidFill>
+            <a:prstDash val="solid"/>
+          </a:ln>
+        </p:spPr>
+        <p:txBody>
+          <a:bodyPr wrap="square" lIns="0" tIns="0" rIns="25400" bIns="0" rtlCol="0" anchor="ctr"/>
+          <a:lstStyle/>
+          <a:p>
+            <a:pPr algn="r">
+              <a:lnSpc>
+                <a:spcPct val="100%"/>
+              </a:lnSpc>
+              <a:defRPr sz="500" b="1">
+                <a:solidFill>
+                  <a:srgbClr val="000000"/>
+                </a:solidFill>
+                <a:latin typeface="Times New Roman"/>
+                <a:ea typeface="Times New Roman"/>
+                <a:cs typeface="Times New Roman"/>
+              </a:defRPr>
+            </a:pPr>
+            <a:r>
+              <a:rPr sz="500" b="1">
+                <a:latin typeface="Times New Roman"/>
+                <a:ea typeface="Times New Roman"/>
+                <a:cs typeface="Times New Roman"/>
+              </a:rPr>
+              <a:t>0.00</a:t>
+            </a:r>
+          </a:p>
+        </p:txBody>
+      </p:sp>
+      <p:sp>
+        <p:nvSpPr>
+          <p:cNvPr id="1289444182" name="Text">
+    </p:cNvPr>
+          <p:cNvSpPr>
+            <a:spLocks noGrp="1"/>
+          </p:cNvSpPr>
+          <p:nvPr/>
+        </p:nvSpPr>
+        <p:spPr>
+          <a:xfrm rot="0">
+            <a:off x="3022600" y="1308100"/>
+            <a:ext cx="863600" cy="203200"/>
+          </a:xfrm>
+          <a:prstGeom prst="rect">
+            <a:avLst/>
+          </a:prstGeom>
+          <a:solidFill>
+            <a:srgbClr val="CCFFFF"/>
+          </a:solidFill>
+          <a:ln w="3175">
+            <a:solidFill>
+              <a:srgbClr val="000000"/>
+            </a:solidFill>
+            <a:prstDash val="solid"/>
+          </a:ln>
+        </p:spPr>
+        <p:txBody>
+          <a:bodyPr wrap="square" lIns="0" tIns="0" rIns="25400" bIns="0" rtlCol="0" anchor="ctr"/>
+          <a:lstStyle/>
+          <a:p>
+            <a:pPr algn="r">
+              <a:lnSpc>
+                <a:spcPct val="100%"/>
+              </a:lnSpc>
+              <a:defRPr sz="500" b="1">
+                <a:solidFill>
+                  <a:srgbClr val="000000"/>
+                </a:solidFill>
+                <a:latin typeface="Times New Roman"/>
+                <a:ea typeface="Times New Roman"/>
+                <a:cs typeface="Times New Roman"/>
+              </a:defRPr>
+            </a:pPr>
+            <a:r>
+              <a:rPr sz="500" b="1">
+                <a:latin typeface="Times New Roman"/>
+                <a:ea typeface="Times New Roman"/>
+                <a:cs typeface="Times New Roman"/>
+              </a:rPr>
+              <a:t>0.00</a:t>
+            </a:r>
+          </a:p>
+        </p:txBody>
+      </p:sp>
+      <p:sp>
+        <p:nvSpPr>
+          <p:cNvPr id="1146788481" name="Text">
+    </p:cNvPr>
+          <p:cNvSpPr>
+            <a:spLocks noGrp="1"/>
+          </p:cNvSpPr>
+          <p:nvPr/>
+        </p:nvSpPr>
+        <p:spPr>
+          <a:xfrm rot="0">
+            <a:off x="254000" y="7124700"/>
+            <a:ext cx="10045700" cy="152400"/>
+          </a:xfrm>
+          <a:prstGeom prst="rect">
+            <a:avLst/>
+          </a:prstGeom>
+        </p:spPr>
+        <p:txBody>
+          <a:bodyPr wrap="square" lIns="0" tIns="0" rIns="0" bIns="0" rtlCol="0" anchor="t"/>
+          <a:lstStyle/>
+          <a:p>
+            <a:pPr algn="ctr">
+              <a:lnSpc>
+                <a:spcPct val="100%"/>
+              </a:lnSpc>
+              <a:defRPr sz="800">
+                <a:solidFill>
+                  <a:srgbClr val="000000"/>
+                </a:solidFill>
+                <a:latin typeface="Times New Roman"/>
+                <a:ea typeface="Times New Roman"/>
+                <a:cs typeface="Times New Roman"/>
+              </a:defRPr>
+            </a:pPr>
+            <a:r>
+              <a:rPr sz="800">
+                <a:latin typeface="Times New Roman"/>
+                <a:ea typeface="Times New Roman"/>
+                <a:cs typeface="Times New Roman"/>
+              </a:rPr>
+              <a:t>Rua direita da rotunda da fubu em frente gondo africa/ Tel.:923707677</a:t>
+            </a:r>
+          </a:p>
+        </p:txBody>
+      </p:sp>
+    </p:spTree>
+  </p:cSld>
+  <p:clrMapOvr>
+    <a:masterClrMapping/>
+  </p:clrMapOvr>
+</p:sld>
 </file>
 
 <file path=ppt/theme/theme1.xml><?xml version="1.0" encoding="utf-8"?>
